--- a/docs/module2-git_and_github_for_version_control/module2s1/RECODE – Mod 2.pptx
+++ b/docs/module2-git_and_github_for_version_control/module2s1/RECODE – Mod 2.pptx
@@ -13909,6 +13909,22 @@
             </a:r>
             <a:r>
               <a:rPr lang="de-DE" sz="1400" dirty="0"/>
+              <a:t> log –</a:t>
+            </a:r>
+            <a:r>
+              <a:rPr lang="de-DE" sz="1400" dirty="0" err="1"/>
+              <a:t>oneline</a:t>
+            </a:r>
+            <a:r>
+              <a:rPr lang="de-DE" sz="1400" dirty="0"/>
+              <a:t>, </a:t>
+            </a:r>
+            <a:r>
+              <a:rPr lang="de-DE" sz="1400" dirty="0" err="1"/>
+              <a:t>git</a:t>
+            </a:r>
+            <a:r>
+              <a:rPr lang="de-DE" sz="1400" dirty="0"/>
               <a:t> </a:t>
             </a:r>
             <a:r>
@@ -13941,22 +13957,6 @@
             </a:r>
             <a:r>
               <a:rPr lang="de-DE" sz="1400" dirty="0"/>
-              <a:t> </a:t>
-            </a:r>
-            <a:r>
-              <a:rPr lang="de-DE" sz="1400" dirty="0" err="1"/>
-              <a:t>reset</a:t>
-            </a:r>
-            <a:r>
-              <a:rPr lang="de-DE" sz="1400" dirty="0"/>
-              <a:t>, </a:t>
-            </a:r>
-            <a:r>
-              <a:rPr lang="de-DE" sz="1400" dirty="0" err="1"/>
-              <a:t>git</a:t>
-            </a:r>
-            <a:r>
-              <a:rPr lang="de-DE" sz="1400"/>
               <a:t> merge </a:t>
             </a:r>
             <a:endParaRPr lang="en-GB" sz="1400" dirty="0"/>

--- a/docs/module2-git_and_github_for_version_control/module2s1/RECODE – Mod 2.pptx
+++ b/docs/module2-git_and_github_for_version_control/module2s1/RECODE – Mod 2.pptx
@@ -13684,15 +13684,15 @@
             </a:r>
             <a:r>
               <a:rPr lang="de-DE" dirty="0" err="1"/>
-              <a:t>command</a:t>
-            </a:r>
-            <a:r>
-              <a:rPr lang="de-DE" dirty="0"/>
-              <a:t> </a:t>
+              <a:t>set</a:t>
+            </a:r>
+            <a:r>
+              <a:rPr lang="de-DE" dirty="0"/>
+              <a:t> of </a:t>
             </a:r>
             <a:r>
               <a:rPr lang="de-DE" dirty="0" err="1"/>
-              <a:t>set</a:t>
+              <a:t>commands</a:t>
             </a:r>
             <a:br>
               <a:rPr lang="de-DE" dirty="0"/>
@@ -13719,8 +13719,8 @@
         </p:nvSpPr>
         <p:spPr>
           <a:xfrm>
-            <a:off x="539750" y="1292225"/>
-            <a:ext cx="8064250" cy="3263638"/>
+            <a:off x="539750" y="1619999"/>
+            <a:ext cx="8064250" cy="2935863"/>
           </a:xfrm>
         </p:spPr>
         <p:txBody>
@@ -13745,7 +13745,39 @@
             </a:r>
             <a:r>
               <a:rPr lang="de-DE" dirty="0"/>
-              <a:t> change:</a:t>
+              <a:t> change, </a:t>
+            </a:r>
+            <a:r>
+              <a:rPr lang="de-DE" dirty="0" err="1"/>
+              <a:t>these</a:t>
+            </a:r>
+            <a:r>
+              <a:rPr lang="de-DE" dirty="0"/>
+              <a:t> </a:t>
+            </a:r>
+            <a:r>
+              <a:rPr lang="de-DE" dirty="0" err="1"/>
+              <a:t>three</a:t>
+            </a:r>
+            <a:r>
+              <a:rPr lang="de-DE" dirty="0"/>
+              <a:t> </a:t>
+            </a:r>
+            <a:r>
+              <a:rPr lang="de-DE" dirty="0" err="1"/>
+              <a:t>are</a:t>
+            </a:r>
+            <a:r>
+              <a:rPr lang="de-DE" dirty="0"/>
+              <a:t> </a:t>
+            </a:r>
+            <a:r>
+              <a:rPr lang="de-DE" dirty="0" err="1"/>
+              <a:t>enough</a:t>
+            </a:r>
+            <a:r>
+              <a:rPr lang="de-DE" dirty="0"/>
+              <a:t>:</a:t>
             </a:r>
             <a:endParaRPr lang="de-DE" sz="1400" dirty="0"/>
           </a:p>
@@ -13785,8 +13817,13 @@
             </a:r>
             <a:r>
               <a:rPr lang="de-DE" sz="1400" dirty="0"/>
-              <a:t> switch -c improve-module2-docs</a:t>
-            </a:r>
+              <a:t> </a:t>
+            </a:r>
+            <a:r>
+              <a:rPr lang="de-DE" sz="1400" dirty="0" err="1"/>
+              <a:t>add</a:t>
+            </a:r>
+            <a:endParaRPr lang="de-DE" sz="1400" dirty="0"/>
           </a:p>
           <a:p>
             <a:pPr marL="285750" indent="-285750">
@@ -13806,69 +13843,11 @@
             </a:r>
             <a:r>
               <a:rPr lang="de-DE" sz="1400" dirty="0" err="1"/>
-              <a:t>add</a:t>
+              <a:t>commit</a:t>
             </a:r>
             <a:r>
               <a:rPr lang="de-DE" sz="1400" dirty="0"/>
-              <a:t> </a:t>
-            </a:r>
-            <a:r>
-              <a:rPr lang="de-DE" sz="1400" dirty="0" err="1"/>
-              <a:t>docs</a:t>
-            </a:r>
-            <a:r>
-              <a:rPr lang="de-DE" sz="1400" dirty="0"/>
-              <a:t>/module2-git_and_github_for_version_control/</a:t>
-            </a:r>
-          </a:p>
-          <a:p>
-            <a:pPr marL="285750" indent="-285750">
-              <a:lnSpc>
-                <a:spcPct val="150000"/>
-              </a:lnSpc>
-              <a:buFont typeface="Arial" panose="020B0604020202020204" pitchFamily="34" charset="0"/>
-              <a:buChar char="•"/>
-            </a:pPr>
-            <a:r>
-              <a:rPr lang="de-DE" sz="1400" dirty="0" err="1"/>
-              <a:t>git</a:t>
-            </a:r>
-            <a:r>
-              <a:rPr lang="de-DE" sz="1400" dirty="0"/>
-              <a:t> </a:t>
-            </a:r>
-            <a:r>
-              <a:rPr lang="de-DE" sz="1400" dirty="0" err="1"/>
-              <a:t>commit</a:t>
-            </a:r>
-            <a:r>
-              <a:rPr lang="de-DE" sz="1400" dirty="0"/>
-              <a:t> -m „YOUR USEFUL COMMIT MESSAGE"</a:t>
-            </a:r>
-          </a:p>
-          <a:p>
-            <a:pPr marL="285750" indent="-285750">
-              <a:lnSpc>
-                <a:spcPct val="150000"/>
-              </a:lnSpc>
-              <a:buFont typeface="Arial" panose="020B0604020202020204" pitchFamily="34" charset="0"/>
-              <a:buChar char="•"/>
-            </a:pPr>
-            <a:r>
-              <a:rPr lang="de-DE" sz="1400" dirty="0" err="1"/>
-              <a:t>git</a:t>
-            </a:r>
-            <a:r>
-              <a:rPr lang="de-DE" sz="1400" dirty="0"/>
-              <a:t> push -u </a:t>
-            </a:r>
-            <a:r>
-              <a:rPr lang="de-DE" sz="1400" dirty="0" err="1"/>
-              <a:t>origin</a:t>
-            </a:r>
-            <a:r>
-              <a:rPr lang="de-DE" sz="1400" dirty="0"/>
-              <a:t> improve-module2-docs</a:t>
+              <a:t> -m „MESSAGE"</a:t>
             </a:r>
           </a:p>
           <a:p>
